--- a/doc/开发进度.pptx
+++ b/doc/开发进度.pptx
@@ -8,6 +8,7 @@
     <p:sldId id="256" r:id="rId2"/>
     <p:sldId id="257" r:id="rId3"/>
     <p:sldId id="258" r:id="rId4"/>
+    <p:sldId id="259" r:id="rId5"/>
   </p:sldIdLst>
   <p:sldSz cx="12192000" cy="6858000"/>
   <p:notesSz cx="6858000" cy="9144000"/>
@@ -261,7 +262,7 @@
           <a:p>
             <a:fld id="{C1A1B662-7041-47BC-8FB0-22DE2B3507AE}" type="datetimeFigureOut">
               <a:rPr lang="zh-CN" altLang="en-US" smtClean="0"/>
-              <a:t>2025/11/9</a:t>
+              <a:t>2025/11/17</a:t>
             </a:fld>
             <a:endParaRPr lang="zh-CN" altLang="en-US"/>
           </a:p>
@@ -459,7 +460,7 @@
           <a:p>
             <a:fld id="{C1A1B662-7041-47BC-8FB0-22DE2B3507AE}" type="datetimeFigureOut">
               <a:rPr lang="zh-CN" altLang="en-US" smtClean="0"/>
-              <a:t>2025/11/9</a:t>
+              <a:t>2025/11/17</a:t>
             </a:fld>
             <a:endParaRPr lang="zh-CN" altLang="en-US"/>
           </a:p>
@@ -667,7 +668,7 @@
           <a:p>
             <a:fld id="{C1A1B662-7041-47BC-8FB0-22DE2B3507AE}" type="datetimeFigureOut">
               <a:rPr lang="zh-CN" altLang="en-US" smtClean="0"/>
-              <a:t>2025/11/9</a:t>
+              <a:t>2025/11/17</a:t>
             </a:fld>
             <a:endParaRPr lang="zh-CN" altLang="en-US"/>
           </a:p>
@@ -865,7 +866,7 @@
           <a:p>
             <a:fld id="{C1A1B662-7041-47BC-8FB0-22DE2B3507AE}" type="datetimeFigureOut">
               <a:rPr lang="zh-CN" altLang="en-US" smtClean="0"/>
-              <a:t>2025/11/9</a:t>
+              <a:t>2025/11/17</a:t>
             </a:fld>
             <a:endParaRPr lang="zh-CN" altLang="en-US"/>
           </a:p>
@@ -1140,7 +1141,7 @@
           <a:p>
             <a:fld id="{C1A1B662-7041-47BC-8FB0-22DE2B3507AE}" type="datetimeFigureOut">
               <a:rPr lang="zh-CN" altLang="en-US" smtClean="0"/>
-              <a:t>2025/11/9</a:t>
+              <a:t>2025/11/17</a:t>
             </a:fld>
             <a:endParaRPr lang="zh-CN" altLang="en-US"/>
           </a:p>
@@ -1405,7 +1406,7 @@
           <a:p>
             <a:fld id="{C1A1B662-7041-47BC-8FB0-22DE2B3507AE}" type="datetimeFigureOut">
               <a:rPr lang="zh-CN" altLang="en-US" smtClean="0"/>
-              <a:t>2025/11/9</a:t>
+              <a:t>2025/11/17</a:t>
             </a:fld>
             <a:endParaRPr lang="zh-CN" altLang="en-US"/>
           </a:p>
@@ -1817,7 +1818,7 @@
           <a:p>
             <a:fld id="{C1A1B662-7041-47BC-8FB0-22DE2B3507AE}" type="datetimeFigureOut">
               <a:rPr lang="zh-CN" altLang="en-US" smtClean="0"/>
-              <a:t>2025/11/9</a:t>
+              <a:t>2025/11/17</a:t>
             </a:fld>
             <a:endParaRPr lang="zh-CN" altLang="en-US"/>
           </a:p>
@@ -1958,7 +1959,7 @@
           <a:p>
             <a:fld id="{C1A1B662-7041-47BC-8FB0-22DE2B3507AE}" type="datetimeFigureOut">
               <a:rPr lang="zh-CN" altLang="en-US" smtClean="0"/>
-              <a:t>2025/11/9</a:t>
+              <a:t>2025/11/17</a:t>
             </a:fld>
             <a:endParaRPr lang="zh-CN" altLang="en-US"/>
           </a:p>
@@ -2071,7 +2072,7 @@
           <a:p>
             <a:fld id="{C1A1B662-7041-47BC-8FB0-22DE2B3507AE}" type="datetimeFigureOut">
               <a:rPr lang="zh-CN" altLang="en-US" smtClean="0"/>
-              <a:t>2025/11/9</a:t>
+              <a:t>2025/11/17</a:t>
             </a:fld>
             <a:endParaRPr lang="zh-CN" altLang="en-US"/>
           </a:p>
@@ -2382,7 +2383,7 @@
           <a:p>
             <a:fld id="{C1A1B662-7041-47BC-8FB0-22DE2B3507AE}" type="datetimeFigureOut">
               <a:rPr lang="zh-CN" altLang="en-US" smtClean="0"/>
-              <a:t>2025/11/9</a:t>
+              <a:t>2025/11/17</a:t>
             </a:fld>
             <a:endParaRPr lang="zh-CN" altLang="en-US"/>
           </a:p>
@@ -2670,7 +2671,7 @@
           <a:p>
             <a:fld id="{C1A1B662-7041-47BC-8FB0-22DE2B3507AE}" type="datetimeFigureOut">
               <a:rPr lang="zh-CN" altLang="en-US" smtClean="0"/>
-              <a:t>2025/11/9</a:t>
+              <a:t>2025/11/17</a:t>
             </a:fld>
             <a:endParaRPr lang="zh-CN" altLang="en-US"/>
           </a:p>
@@ -2911,7 +2912,7 @@
           <a:p>
             <a:fld id="{C1A1B662-7041-47BC-8FB0-22DE2B3507AE}" type="datetimeFigureOut">
               <a:rPr lang="zh-CN" altLang="en-US" smtClean="0"/>
-              <a:t>2025/11/9</a:t>
+              <a:t>2025/11/17</a:t>
             </a:fld>
             <a:endParaRPr lang="zh-CN" altLang="en-US"/>
           </a:p>
@@ -3924,6 +3925,171 @@
 </p:sld>
 </file>
 
+<file path=ppt/slides/slide4.xml><?xml version="1.0" encoding="utf-8"?>
+<p:sld xmlns:a="http://schemas.openxmlformats.org/drawingml/2006/main" xmlns:r="http://schemas.openxmlformats.org/officeDocument/2006/relationships" xmlns:p="http://schemas.openxmlformats.org/presentationml/2006/main">
+  <p:cSld>
+    <p:spTree>
+      <p:nvGrpSpPr>
+        <p:cNvPr id="1" name=""/>
+        <p:cNvGrpSpPr/>
+        <p:nvPr/>
+      </p:nvGrpSpPr>
+      <p:grpSpPr>
+        <a:xfrm>
+          <a:off x="0" y="0"/>
+          <a:ext cx="0" cy="0"/>
+          <a:chOff x="0" y="0"/>
+          <a:chExt cx="0" cy="0"/>
+        </a:xfrm>
+      </p:grpSpPr>
+      <p:sp>
+        <p:nvSpPr>
+          <p:cNvPr id="3" name="文本框 2">
+            <a:extLst>
+              <a:ext uri="{FF2B5EF4-FFF2-40B4-BE49-F238E27FC236}">
+                <a16:creationId xmlns:a16="http://schemas.microsoft.com/office/drawing/2014/main" id="{DF3D8280-9710-4994-2B6D-BC810217088A}"/>
+              </a:ext>
+            </a:extLst>
+          </p:cNvPr>
+          <p:cNvSpPr txBox="1"/>
+          <p:nvPr/>
+        </p:nvSpPr>
+        <p:spPr>
+          <a:xfrm>
+            <a:off x="0" y="116541"/>
+            <a:ext cx="3523722" cy="400110"/>
+          </a:xfrm>
+          <a:prstGeom prst="rect">
+            <a:avLst/>
+          </a:prstGeom>
+          <a:noFill/>
+        </p:spPr>
+        <p:txBody>
+          <a:bodyPr wrap="none" rtlCol="0">
+            <a:spAutoFit/>
+          </a:bodyPr>
+          <a:lstStyle/>
+          <a:p>
+            <a:r>
+              <a:rPr lang="en-US" altLang="zh-CN" sz="2000" b="1" dirty="0"/>
+              <a:t>Week3——2025.11.10-11.16</a:t>
+            </a:r>
+            <a:endParaRPr lang="zh-CN" altLang="en-US" sz="2000" b="1" dirty="0"/>
+          </a:p>
+        </p:txBody>
+      </p:sp>
+      <p:sp>
+        <p:nvSpPr>
+          <p:cNvPr id="8" name="文本框 7">
+            <a:extLst>
+              <a:ext uri="{FF2B5EF4-FFF2-40B4-BE49-F238E27FC236}">
+                <a16:creationId xmlns:a16="http://schemas.microsoft.com/office/drawing/2014/main" id="{C91C78B4-A60D-8450-F46E-D5EEFE519204}"/>
+              </a:ext>
+            </a:extLst>
+          </p:cNvPr>
+          <p:cNvSpPr txBox="1"/>
+          <p:nvPr/>
+        </p:nvSpPr>
+        <p:spPr>
+          <a:xfrm>
+            <a:off x="860613" y="1899408"/>
+            <a:ext cx="3433953" cy="569515"/>
+          </a:xfrm>
+          <a:prstGeom prst="rect">
+            <a:avLst/>
+          </a:prstGeom>
+          <a:noFill/>
+        </p:spPr>
+        <p:txBody>
+          <a:bodyPr wrap="none" rtlCol="0">
+            <a:spAutoFit/>
+          </a:bodyPr>
+          <a:lstStyle/>
+          <a:p>
+            <a:pPr marL="342900" indent="-342900">
+              <a:lnSpc>
+                <a:spcPct val="200000"/>
+              </a:lnSpc>
+              <a:buAutoNum type="arabicPeriod"/>
+            </a:pPr>
+            <a:r>
+              <a:rPr lang="zh-CN" altLang="en-US" dirty="0"/>
+              <a:t>添加树形工程结构</a:t>
+            </a:r>
+            <a:r>
+              <a:rPr lang="en-US" altLang="zh-CN" dirty="0"/>
+              <a:t>(</a:t>
+            </a:r>
+            <a:r>
+              <a:rPr lang="zh-CN" altLang="en-US" dirty="0"/>
+              <a:t>未完成</a:t>
+            </a:r>
+            <a:r>
+              <a:rPr lang="en-US" altLang="zh-CN" dirty="0"/>
+              <a:t>)</a:t>
+            </a:r>
+            <a:r>
+              <a:rPr lang="zh-CN" altLang="en-US" dirty="0"/>
+              <a:t>。</a:t>
+            </a:r>
+          </a:p>
+        </p:txBody>
+      </p:sp>
+      <p:sp>
+        <p:nvSpPr>
+          <p:cNvPr id="5" name="文本框 4">
+            <a:extLst>
+              <a:ext uri="{FF2B5EF4-FFF2-40B4-BE49-F238E27FC236}">
+                <a16:creationId xmlns:a16="http://schemas.microsoft.com/office/drawing/2014/main" id="{F5DA3944-C6D0-B472-951A-B09A7130D235}"/>
+              </a:ext>
+            </a:extLst>
+          </p:cNvPr>
+          <p:cNvSpPr txBox="1"/>
+          <p:nvPr/>
+        </p:nvSpPr>
+        <p:spPr>
+          <a:xfrm>
+            <a:off x="3191434" y="5952564"/>
+            <a:ext cx="6493957" cy="707886"/>
+          </a:xfrm>
+          <a:prstGeom prst="rect">
+            <a:avLst/>
+          </a:prstGeom>
+          <a:noFill/>
+        </p:spPr>
+        <p:txBody>
+          <a:bodyPr wrap="none" rtlCol="0">
+            <a:spAutoFit/>
+          </a:bodyPr>
+          <a:lstStyle/>
+          <a:p>
+            <a:r>
+              <a:rPr lang="en-US" altLang="zh-CN" sz="4000" b="1" dirty="0">
+                <a:latin typeface="微软雅黑" panose="020B0503020204020204" pitchFamily="34" charset="-122"/>
+                <a:ea typeface="微软雅黑" panose="020B0503020204020204" pitchFamily="34" charset="-122"/>
+              </a:rPr>
+              <a:t>Shit It Until You Make It </a:t>
+            </a:r>
+            <a:endParaRPr lang="zh-CN" altLang="en-US" sz="4000" b="1" dirty="0">
+              <a:latin typeface="微软雅黑" panose="020B0503020204020204" pitchFamily="34" charset="-122"/>
+              <a:ea typeface="微软雅黑" panose="020B0503020204020204" pitchFamily="34" charset="-122"/>
+            </a:endParaRPr>
+          </a:p>
+        </p:txBody>
+      </p:sp>
+    </p:spTree>
+    <p:extLst>
+      <p:ext uri="{BB962C8B-B14F-4D97-AF65-F5344CB8AC3E}">
+        <p14:creationId xmlns:p14="http://schemas.microsoft.com/office/powerpoint/2010/main" val="3179270973"/>
+      </p:ext>
+    </p:extLst>
+  </p:cSld>
+  <p:clrMapOvr>
+    <a:masterClrMapping/>
+  </p:clrMapOvr>
+</p:sld>
+</file>
+
 <file path=ppt/theme/theme1.xml><?xml version="1.0" encoding="utf-8"?>
 <a:theme xmlns:a="http://schemas.openxmlformats.org/drawingml/2006/main" name="Office 主题​​">
   <a:themeElements>

--- a/doc/开发进度.pptx
+++ b/doc/开发进度.pptx
@@ -9,6 +9,7 @@
     <p:sldId id="257" r:id="rId3"/>
     <p:sldId id="258" r:id="rId4"/>
     <p:sldId id="259" r:id="rId5"/>
+    <p:sldId id="260" r:id="rId6"/>
   </p:sldIdLst>
   <p:sldSz cx="12192000" cy="6858000"/>
   <p:notesSz cx="6858000" cy="9144000"/>
@@ -262,7 +263,7 @@
           <a:p>
             <a:fld id="{C1A1B662-7041-47BC-8FB0-22DE2B3507AE}" type="datetimeFigureOut">
               <a:rPr lang="zh-CN" altLang="en-US" smtClean="0"/>
-              <a:t>2025/11/17</a:t>
+              <a:t>2025/11/23</a:t>
             </a:fld>
             <a:endParaRPr lang="zh-CN" altLang="en-US"/>
           </a:p>
@@ -460,7 +461,7 @@
           <a:p>
             <a:fld id="{C1A1B662-7041-47BC-8FB0-22DE2B3507AE}" type="datetimeFigureOut">
               <a:rPr lang="zh-CN" altLang="en-US" smtClean="0"/>
-              <a:t>2025/11/17</a:t>
+              <a:t>2025/11/23</a:t>
             </a:fld>
             <a:endParaRPr lang="zh-CN" altLang="en-US"/>
           </a:p>
@@ -668,7 +669,7 @@
           <a:p>
             <a:fld id="{C1A1B662-7041-47BC-8FB0-22DE2B3507AE}" type="datetimeFigureOut">
               <a:rPr lang="zh-CN" altLang="en-US" smtClean="0"/>
-              <a:t>2025/11/17</a:t>
+              <a:t>2025/11/23</a:t>
             </a:fld>
             <a:endParaRPr lang="zh-CN" altLang="en-US"/>
           </a:p>
@@ -866,7 +867,7 @@
           <a:p>
             <a:fld id="{C1A1B662-7041-47BC-8FB0-22DE2B3507AE}" type="datetimeFigureOut">
               <a:rPr lang="zh-CN" altLang="en-US" smtClean="0"/>
-              <a:t>2025/11/17</a:t>
+              <a:t>2025/11/23</a:t>
             </a:fld>
             <a:endParaRPr lang="zh-CN" altLang="en-US"/>
           </a:p>
@@ -1141,7 +1142,7 @@
           <a:p>
             <a:fld id="{C1A1B662-7041-47BC-8FB0-22DE2B3507AE}" type="datetimeFigureOut">
               <a:rPr lang="zh-CN" altLang="en-US" smtClean="0"/>
-              <a:t>2025/11/17</a:t>
+              <a:t>2025/11/23</a:t>
             </a:fld>
             <a:endParaRPr lang="zh-CN" altLang="en-US"/>
           </a:p>
@@ -1406,7 +1407,7 @@
           <a:p>
             <a:fld id="{C1A1B662-7041-47BC-8FB0-22DE2B3507AE}" type="datetimeFigureOut">
               <a:rPr lang="zh-CN" altLang="en-US" smtClean="0"/>
-              <a:t>2025/11/17</a:t>
+              <a:t>2025/11/23</a:t>
             </a:fld>
             <a:endParaRPr lang="zh-CN" altLang="en-US"/>
           </a:p>
@@ -1818,7 +1819,7 @@
           <a:p>
             <a:fld id="{C1A1B662-7041-47BC-8FB0-22DE2B3507AE}" type="datetimeFigureOut">
               <a:rPr lang="zh-CN" altLang="en-US" smtClean="0"/>
-              <a:t>2025/11/17</a:t>
+              <a:t>2025/11/23</a:t>
             </a:fld>
             <a:endParaRPr lang="zh-CN" altLang="en-US"/>
           </a:p>
@@ -1959,7 +1960,7 @@
           <a:p>
             <a:fld id="{C1A1B662-7041-47BC-8FB0-22DE2B3507AE}" type="datetimeFigureOut">
               <a:rPr lang="zh-CN" altLang="en-US" smtClean="0"/>
-              <a:t>2025/11/17</a:t>
+              <a:t>2025/11/23</a:t>
             </a:fld>
             <a:endParaRPr lang="zh-CN" altLang="en-US"/>
           </a:p>
@@ -2072,7 +2073,7 @@
           <a:p>
             <a:fld id="{C1A1B662-7041-47BC-8FB0-22DE2B3507AE}" type="datetimeFigureOut">
               <a:rPr lang="zh-CN" altLang="en-US" smtClean="0"/>
-              <a:t>2025/11/17</a:t>
+              <a:t>2025/11/23</a:t>
             </a:fld>
             <a:endParaRPr lang="zh-CN" altLang="en-US"/>
           </a:p>
@@ -2383,7 +2384,7 @@
           <a:p>
             <a:fld id="{C1A1B662-7041-47BC-8FB0-22DE2B3507AE}" type="datetimeFigureOut">
               <a:rPr lang="zh-CN" altLang="en-US" smtClean="0"/>
-              <a:t>2025/11/17</a:t>
+              <a:t>2025/11/23</a:t>
             </a:fld>
             <a:endParaRPr lang="zh-CN" altLang="en-US"/>
           </a:p>
@@ -2671,7 +2672,7 @@
           <a:p>
             <a:fld id="{C1A1B662-7041-47BC-8FB0-22DE2B3507AE}" type="datetimeFigureOut">
               <a:rPr lang="zh-CN" altLang="en-US" smtClean="0"/>
-              <a:t>2025/11/17</a:t>
+              <a:t>2025/11/23</a:t>
             </a:fld>
             <a:endParaRPr lang="zh-CN" altLang="en-US"/>
           </a:p>
@@ -2912,7 +2913,7 @@
           <a:p>
             <a:fld id="{C1A1B662-7041-47BC-8FB0-22DE2B3507AE}" type="datetimeFigureOut">
               <a:rPr lang="zh-CN" altLang="en-US" smtClean="0"/>
-              <a:t>2025/11/17</a:t>
+              <a:t>2025/11/23</a:t>
             </a:fld>
             <a:endParaRPr lang="zh-CN" altLang="en-US"/>
           </a:p>
@@ -4090,6 +4091,134 @@
 </p:sld>
 </file>
 
+<file path=ppt/slides/slide5.xml><?xml version="1.0" encoding="utf-8"?>
+<p:sld xmlns:a="http://schemas.openxmlformats.org/drawingml/2006/main" xmlns:r="http://schemas.openxmlformats.org/officeDocument/2006/relationships" xmlns:p="http://schemas.openxmlformats.org/presentationml/2006/main">
+  <p:cSld>
+    <p:spTree>
+      <p:nvGrpSpPr>
+        <p:cNvPr id="1" name=""/>
+        <p:cNvGrpSpPr/>
+        <p:nvPr/>
+      </p:nvGrpSpPr>
+      <p:grpSpPr>
+        <a:xfrm>
+          <a:off x="0" y="0"/>
+          <a:ext cx="0" cy="0"/>
+          <a:chOff x="0" y="0"/>
+          <a:chExt cx="0" cy="0"/>
+        </a:xfrm>
+      </p:grpSpPr>
+      <p:sp>
+        <p:nvSpPr>
+          <p:cNvPr id="3" name="文本框 2">
+            <a:extLst>
+              <a:ext uri="{FF2B5EF4-FFF2-40B4-BE49-F238E27FC236}">
+                <a16:creationId xmlns:a16="http://schemas.microsoft.com/office/drawing/2014/main" id="{DF3D8280-9710-4994-2B6D-BC810217088A}"/>
+              </a:ext>
+            </a:extLst>
+          </p:cNvPr>
+          <p:cNvSpPr txBox="1"/>
+          <p:nvPr/>
+        </p:nvSpPr>
+        <p:spPr>
+          <a:xfrm>
+            <a:off x="0" y="116541"/>
+            <a:ext cx="3523722" cy="400110"/>
+          </a:xfrm>
+          <a:prstGeom prst="rect">
+            <a:avLst/>
+          </a:prstGeom>
+          <a:noFill/>
+        </p:spPr>
+        <p:txBody>
+          <a:bodyPr wrap="none" rtlCol="0">
+            <a:spAutoFit/>
+          </a:bodyPr>
+          <a:lstStyle/>
+          <a:p>
+            <a:r>
+              <a:rPr lang="en-US" altLang="zh-CN" sz="2000" b="1" dirty="0"/>
+              <a:t>Week4——2025.11.17-11.23</a:t>
+            </a:r>
+            <a:endParaRPr lang="zh-CN" altLang="en-US" sz="2000" b="1" dirty="0"/>
+          </a:p>
+        </p:txBody>
+      </p:sp>
+      <p:sp>
+        <p:nvSpPr>
+          <p:cNvPr id="8" name="文本框 7">
+            <a:extLst>
+              <a:ext uri="{FF2B5EF4-FFF2-40B4-BE49-F238E27FC236}">
+                <a16:creationId xmlns:a16="http://schemas.microsoft.com/office/drawing/2014/main" id="{C91C78B4-A60D-8450-F46E-D5EEFE519204}"/>
+              </a:ext>
+            </a:extLst>
+          </p:cNvPr>
+          <p:cNvSpPr txBox="1"/>
+          <p:nvPr/>
+        </p:nvSpPr>
+        <p:spPr>
+          <a:xfrm>
+            <a:off x="1075765" y="2141455"/>
+            <a:ext cx="3792069" cy="1123513"/>
+          </a:xfrm>
+          <a:prstGeom prst="rect">
+            <a:avLst/>
+          </a:prstGeom>
+          <a:noFill/>
+        </p:spPr>
+        <p:txBody>
+          <a:bodyPr wrap="square" rtlCol="0">
+            <a:spAutoFit/>
+          </a:bodyPr>
+          <a:lstStyle/>
+          <a:p>
+            <a:pPr marL="342900" indent="-342900">
+              <a:lnSpc>
+                <a:spcPct val="200000"/>
+              </a:lnSpc>
+              <a:buAutoNum type="arabicPeriod"/>
+            </a:pPr>
+            <a:r>
+              <a:rPr lang="zh-CN" altLang="en-US" dirty="0"/>
+              <a:t>树形菜单完成；</a:t>
+            </a:r>
+            <a:endParaRPr lang="en-US" altLang="zh-CN" dirty="0"/>
+          </a:p>
+          <a:p>
+            <a:pPr marL="342900" indent="-342900">
+              <a:lnSpc>
+                <a:spcPct val="200000"/>
+              </a:lnSpc>
+              <a:buAutoNum type="arabicPeriod"/>
+            </a:pPr>
+            <a:r>
+              <a:rPr lang="zh-CN" altLang="en-US" dirty="0"/>
+              <a:t>参数驱动的模型构建（</a:t>
+            </a:r>
+            <a:r>
+              <a:rPr lang="en-US" altLang="zh-CN" dirty="0"/>
+              <a:t>90%</a:t>
+            </a:r>
+            <a:r>
+              <a:rPr lang="zh-CN" altLang="en-US" dirty="0"/>
+              <a:t>）。</a:t>
+            </a:r>
+          </a:p>
+        </p:txBody>
+      </p:sp>
+    </p:spTree>
+    <p:extLst>
+      <p:ext uri="{BB962C8B-B14F-4D97-AF65-F5344CB8AC3E}">
+        <p14:creationId xmlns:p14="http://schemas.microsoft.com/office/powerpoint/2010/main" val="245645756"/>
+      </p:ext>
+    </p:extLst>
+  </p:cSld>
+  <p:clrMapOvr>
+    <a:masterClrMapping/>
+  </p:clrMapOvr>
+</p:sld>
+</file>
+
 <file path=ppt/theme/theme1.xml><?xml version="1.0" encoding="utf-8"?>
 <a:theme xmlns:a="http://schemas.openxmlformats.org/drawingml/2006/main" name="Office 主题​​">
   <a:themeElements>

--- a/doc/开发进度.pptx
+++ b/doc/开发进度.pptx
@@ -10,6 +10,7 @@
     <p:sldId id="258" r:id="rId4"/>
     <p:sldId id="259" r:id="rId5"/>
     <p:sldId id="260" r:id="rId6"/>
+    <p:sldId id="261" r:id="rId7"/>
   </p:sldIdLst>
   <p:sldSz cx="12192000" cy="6858000"/>
   <p:notesSz cx="6858000" cy="9144000"/>
@@ -263,7 +264,7 @@
           <a:p>
             <a:fld id="{C1A1B662-7041-47BC-8FB0-22DE2B3507AE}" type="datetimeFigureOut">
               <a:rPr lang="zh-CN" altLang="en-US" smtClean="0"/>
-              <a:t>2025/11/23</a:t>
+              <a:t>2025/12/1</a:t>
             </a:fld>
             <a:endParaRPr lang="zh-CN" altLang="en-US"/>
           </a:p>
@@ -461,7 +462,7 @@
           <a:p>
             <a:fld id="{C1A1B662-7041-47BC-8FB0-22DE2B3507AE}" type="datetimeFigureOut">
               <a:rPr lang="zh-CN" altLang="en-US" smtClean="0"/>
-              <a:t>2025/11/23</a:t>
+              <a:t>2025/12/1</a:t>
             </a:fld>
             <a:endParaRPr lang="zh-CN" altLang="en-US"/>
           </a:p>
@@ -669,7 +670,7 @@
           <a:p>
             <a:fld id="{C1A1B662-7041-47BC-8FB0-22DE2B3507AE}" type="datetimeFigureOut">
               <a:rPr lang="zh-CN" altLang="en-US" smtClean="0"/>
-              <a:t>2025/11/23</a:t>
+              <a:t>2025/12/1</a:t>
             </a:fld>
             <a:endParaRPr lang="zh-CN" altLang="en-US"/>
           </a:p>
@@ -867,7 +868,7 @@
           <a:p>
             <a:fld id="{C1A1B662-7041-47BC-8FB0-22DE2B3507AE}" type="datetimeFigureOut">
               <a:rPr lang="zh-CN" altLang="en-US" smtClean="0"/>
-              <a:t>2025/11/23</a:t>
+              <a:t>2025/12/1</a:t>
             </a:fld>
             <a:endParaRPr lang="zh-CN" altLang="en-US"/>
           </a:p>
@@ -1142,7 +1143,7 @@
           <a:p>
             <a:fld id="{C1A1B662-7041-47BC-8FB0-22DE2B3507AE}" type="datetimeFigureOut">
               <a:rPr lang="zh-CN" altLang="en-US" smtClean="0"/>
-              <a:t>2025/11/23</a:t>
+              <a:t>2025/12/1</a:t>
             </a:fld>
             <a:endParaRPr lang="zh-CN" altLang="en-US"/>
           </a:p>
@@ -1407,7 +1408,7 @@
           <a:p>
             <a:fld id="{C1A1B662-7041-47BC-8FB0-22DE2B3507AE}" type="datetimeFigureOut">
               <a:rPr lang="zh-CN" altLang="en-US" smtClean="0"/>
-              <a:t>2025/11/23</a:t>
+              <a:t>2025/12/1</a:t>
             </a:fld>
             <a:endParaRPr lang="zh-CN" altLang="en-US"/>
           </a:p>
@@ -1819,7 +1820,7 @@
           <a:p>
             <a:fld id="{C1A1B662-7041-47BC-8FB0-22DE2B3507AE}" type="datetimeFigureOut">
               <a:rPr lang="zh-CN" altLang="en-US" smtClean="0"/>
-              <a:t>2025/11/23</a:t>
+              <a:t>2025/12/1</a:t>
             </a:fld>
             <a:endParaRPr lang="zh-CN" altLang="en-US"/>
           </a:p>
@@ -1960,7 +1961,7 @@
           <a:p>
             <a:fld id="{C1A1B662-7041-47BC-8FB0-22DE2B3507AE}" type="datetimeFigureOut">
               <a:rPr lang="zh-CN" altLang="en-US" smtClean="0"/>
-              <a:t>2025/11/23</a:t>
+              <a:t>2025/12/1</a:t>
             </a:fld>
             <a:endParaRPr lang="zh-CN" altLang="en-US"/>
           </a:p>
@@ -2073,7 +2074,7 @@
           <a:p>
             <a:fld id="{C1A1B662-7041-47BC-8FB0-22DE2B3507AE}" type="datetimeFigureOut">
               <a:rPr lang="zh-CN" altLang="en-US" smtClean="0"/>
-              <a:t>2025/11/23</a:t>
+              <a:t>2025/12/1</a:t>
             </a:fld>
             <a:endParaRPr lang="zh-CN" altLang="en-US"/>
           </a:p>
@@ -2384,7 +2385,7 @@
           <a:p>
             <a:fld id="{C1A1B662-7041-47BC-8FB0-22DE2B3507AE}" type="datetimeFigureOut">
               <a:rPr lang="zh-CN" altLang="en-US" smtClean="0"/>
-              <a:t>2025/11/23</a:t>
+              <a:t>2025/12/1</a:t>
             </a:fld>
             <a:endParaRPr lang="zh-CN" altLang="en-US"/>
           </a:p>
@@ -2672,7 +2673,7 @@
           <a:p>
             <a:fld id="{C1A1B662-7041-47BC-8FB0-22DE2B3507AE}" type="datetimeFigureOut">
               <a:rPr lang="zh-CN" altLang="en-US" smtClean="0"/>
-              <a:t>2025/11/23</a:t>
+              <a:t>2025/12/1</a:t>
             </a:fld>
             <a:endParaRPr lang="zh-CN" altLang="en-US"/>
           </a:p>
@@ -2913,7 +2914,7 @@
           <a:p>
             <a:fld id="{C1A1B662-7041-47BC-8FB0-22DE2B3507AE}" type="datetimeFigureOut">
               <a:rPr lang="zh-CN" altLang="en-US" smtClean="0"/>
-              <a:t>2025/11/23</a:t>
+              <a:t>2025/12/1</a:t>
             </a:fld>
             <a:endParaRPr lang="zh-CN" altLang="en-US"/>
           </a:p>
@@ -4219,6 +4220,130 @@
 </p:sld>
 </file>
 
+<file path=ppt/slides/slide6.xml><?xml version="1.0" encoding="utf-8"?>
+<p:sld xmlns:a="http://schemas.openxmlformats.org/drawingml/2006/main" xmlns:r="http://schemas.openxmlformats.org/officeDocument/2006/relationships" xmlns:p="http://schemas.openxmlformats.org/presentationml/2006/main">
+  <p:cSld>
+    <p:spTree>
+      <p:nvGrpSpPr>
+        <p:cNvPr id="1" name=""/>
+        <p:cNvGrpSpPr/>
+        <p:nvPr/>
+      </p:nvGrpSpPr>
+      <p:grpSpPr>
+        <a:xfrm>
+          <a:off x="0" y="0"/>
+          <a:ext cx="0" cy="0"/>
+          <a:chOff x="0" y="0"/>
+          <a:chExt cx="0" cy="0"/>
+        </a:xfrm>
+      </p:grpSpPr>
+      <p:sp>
+        <p:nvSpPr>
+          <p:cNvPr id="3" name="文本框 2">
+            <a:extLst>
+              <a:ext uri="{FF2B5EF4-FFF2-40B4-BE49-F238E27FC236}">
+                <a16:creationId xmlns:a16="http://schemas.microsoft.com/office/drawing/2014/main" id="{DF3D8280-9710-4994-2B6D-BC810217088A}"/>
+              </a:ext>
+            </a:extLst>
+          </p:cNvPr>
+          <p:cNvSpPr txBox="1"/>
+          <p:nvPr/>
+        </p:nvSpPr>
+        <p:spPr>
+          <a:xfrm>
+            <a:off x="0" y="116541"/>
+            <a:ext cx="3523722" cy="400110"/>
+          </a:xfrm>
+          <a:prstGeom prst="rect">
+            <a:avLst/>
+          </a:prstGeom>
+          <a:noFill/>
+        </p:spPr>
+        <p:txBody>
+          <a:bodyPr wrap="none" rtlCol="0">
+            <a:spAutoFit/>
+          </a:bodyPr>
+          <a:lstStyle/>
+          <a:p>
+            <a:r>
+              <a:rPr lang="en-US" altLang="zh-CN" sz="2000" b="1" dirty="0"/>
+              <a:t>Week5——2025.11.24-11.30</a:t>
+            </a:r>
+            <a:endParaRPr lang="zh-CN" altLang="en-US" sz="2000" b="1" dirty="0"/>
+          </a:p>
+        </p:txBody>
+      </p:sp>
+      <p:sp>
+        <p:nvSpPr>
+          <p:cNvPr id="8" name="文本框 7">
+            <a:extLst>
+              <a:ext uri="{FF2B5EF4-FFF2-40B4-BE49-F238E27FC236}">
+                <a16:creationId xmlns:a16="http://schemas.microsoft.com/office/drawing/2014/main" id="{C91C78B4-A60D-8450-F46E-D5EEFE519204}"/>
+              </a:ext>
+            </a:extLst>
+          </p:cNvPr>
+          <p:cNvSpPr txBox="1"/>
+          <p:nvPr/>
+        </p:nvSpPr>
+        <p:spPr>
+          <a:xfrm>
+            <a:off x="1075765" y="2141455"/>
+            <a:ext cx="3792069" cy="1123513"/>
+          </a:xfrm>
+          <a:prstGeom prst="rect">
+            <a:avLst/>
+          </a:prstGeom>
+          <a:noFill/>
+        </p:spPr>
+        <p:txBody>
+          <a:bodyPr wrap="square" rtlCol="0">
+            <a:spAutoFit/>
+          </a:bodyPr>
+          <a:lstStyle/>
+          <a:p>
+            <a:pPr marL="342900" indent="-342900">
+              <a:lnSpc>
+                <a:spcPct val="200000"/>
+              </a:lnSpc>
+              <a:buAutoNum type="arabicPeriod"/>
+            </a:pPr>
+            <a:r>
+              <a:rPr lang="zh-CN" altLang="en-US" dirty="0"/>
+              <a:t>参数驱动的模型构建；</a:t>
+            </a:r>
+            <a:endParaRPr lang="en-US" altLang="zh-CN" dirty="0"/>
+          </a:p>
+          <a:p>
+            <a:pPr marL="342900" indent="-342900">
+              <a:lnSpc>
+                <a:spcPct val="200000"/>
+              </a:lnSpc>
+              <a:buAutoNum type="arabicPeriod"/>
+            </a:pPr>
+            <a:r>
+              <a:rPr lang="en-US" altLang="zh-CN" dirty="0" err="1"/>
+              <a:t>vtk</a:t>
+            </a:r>
+            <a:r>
+              <a:rPr lang="zh-CN" altLang="en-US" dirty="0"/>
+              <a:t>渲染窗口封装。</a:t>
+            </a:r>
+          </a:p>
+        </p:txBody>
+      </p:sp>
+    </p:spTree>
+    <p:extLst>
+      <p:ext uri="{BB962C8B-B14F-4D97-AF65-F5344CB8AC3E}">
+        <p14:creationId xmlns:p14="http://schemas.microsoft.com/office/powerpoint/2010/main" val="3944386854"/>
+      </p:ext>
+    </p:extLst>
+  </p:cSld>
+  <p:clrMapOvr>
+    <a:masterClrMapping/>
+  </p:clrMapOvr>
+</p:sld>
+</file>
+
 <file path=ppt/theme/theme1.xml><?xml version="1.0" encoding="utf-8"?>
 <a:theme xmlns:a="http://schemas.openxmlformats.org/drawingml/2006/main" name="Office 主题​​">
   <a:themeElements>
